--- a/MS Fabric/Interview Questions.pptx
+++ b/MS Fabric/Interview Questions.pptx
@@ -106,6 +106,11 @@
       </a:defRPr>
     </a:lvl9pPr>
   </p:defaultTextStyle>
+  <p:extLst>
+    <p:ext uri="{EFAFB233-063F-42B5-8137-9DF3F51BA10A}">
+      <p15:sldGuideLst xmlns:p15="http://schemas.microsoft.com/office/powerpoint/2012/main"/>
+    </p:ext>
+  </p:extLst>
 </p:presentation>
 </file>
 

--- a/MS Fabric/Interview Questions.pptx
+++ b/MS Fabric/Interview Questions.pptx
@@ -263,7 +263,7 @@
           <a:p>
             <a:fld id="{3A2AE38E-CBF9-4377-840F-40238855EB63}" type="datetimeFigureOut">
               <a:rPr lang="en-BE" smtClean="0"/>
-              <a:t>06/04/2026</a:t>
+              <a:t>14/04/2026</a:t>
             </a:fld>
             <a:endParaRPr lang="en-BE"/>
           </a:p>
@@ -463,7 +463,7 @@
           <a:p>
             <a:fld id="{3A2AE38E-CBF9-4377-840F-40238855EB63}" type="datetimeFigureOut">
               <a:rPr lang="en-BE" smtClean="0"/>
-              <a:t>06/04/2026</a:t>
+              <a:t>14/04/2026</a:t>
             </a:fld>
             <a:endParaRPr lang="en-BE"/>
           </a:p>
@@ -673,7 +673,7 @@
           <a:p>
             <a:fld id="{3A2AE38E-CBF9-4377-840F-40238855EB63}" type="datetimeFigureOut">
               <a:rPr lang="en-BE" smtClean="0"/>
-              <a:t>06/04/2026</a:t>
+              <a:t>14/04/2026</a:t>
             </a:fld>
             <a:endParaRPr lang="en-BE"/>
           </a:p>
@@ -873,7 +873,7 @@
           <a:p>
             <a:fld id="{3A2AE38E-CBF9-4377-840F-40238855EB63}" type="datetimeFigureOut">
               <a:rPr lang="en-BE" smtClean="0"/>
-              <a:t>06/04/2026</a:t>
+              <a:t>14/04/2026</a:t>
             </a:fld>
             <a:endParaRPr lang="en-BE"/>
           </a:p>
@@ -1149,7 +1149,7 @@
           <a:p>
             <a:fld id="{3A2AE38E-CBF9-4377-840F-40238855EB63}" type="datetimeFigureOut">
               <a:rPr lang="en-BE" smtClean="0"/>
-              <a:t>06/04/2026</a:t>
+              <a:t>14/04/2026</a:t>
             </a:fld>
             <a:endParaRPr lang="en-BE"/>
           </a:p>
@@ -1417,7 +1417,7 @@
           <a:p>
             <a:fld id="{3A2AE38E-CBF9-4377-840F-40238855EB63}" type="datetimeFigureOut">
               <a:rPr lang="en-BE" smtClean="0"/>
-              <a:t>06/04/2026</a:t>
+              <a:t>14/04/2026</a:t>
             </a:fld>
             <a:endParaRPr lang="en-BE"/>
           </a:p>
@@ -1832,7 +1832,7 @@
           <a:p>
             <a:fld id="{3A2AE38E-CBF9-4377-840F-40238855EB63}" type="datetimeFigureOut">
               <a:rPr lang="en-BE" smtClean="0"/>
-              <a:t>06/04/2026</a:t>
+              <a:t>14/04/2026</a:t>
             </a:fld>
             <a:endParaRPr lang="en-BE"/>
           </a:p>
@@ -1974,7 +1974,7 @@
           <a:p>
             <a:fld id="{3A2AE38E-CBF9-4377-840F-40238855EB63}" type="datetimeFigureOut">
               <a:rPr lang="en-BE" smtClean="0"/>
-              <a:t>06/04/2026</a:t>
+              <a:t>14/04/2026</a:t>
             </a:fld>
             <a:endParaRPr lang="en-BE"/>
           </a:p>
@@ -2087,7 +2087,7 @@
           <a:p>
             <a:fld id="{3A2AE38E-CBF9-4377-840F-40238855EB63}" type="datetimeFigureOut">
               <a:rPr lang="en-BE" smtClean="0"/>
-              <a:t>06/04/2026</a:t>
+              <a:t>14/04/2026</a:t>
             </a:fld>
             <a:endParaRPr lang="en-BE"/>
           </a:p>
@@ -2400,7 +2400,7 @@
           <a:p>
             <a:fld id="{3A2AE38E-CBF9-4377-840F-40238855EB63}" type="datetimeFigureOut">
               <a:rPr lang="en-BE" smtClean="0"/>
-              <a:t>06/04/2026</a:t>
+              <a:t>14/04/2026</a:t>
             </a:fld>
             <a:endParaRPr lang="en-BE"/>
           </a:p>
@@ -2689,7 +2689,7 @@
           <a:p>
             <a:fld id="{3A2AE38E-CBF9-4377-840F-40238855EB63}" type="datetimeFigureOut">
               <a:rPr lang="en-BE" smtClean="0"/>
-              <a:t>06/04/2026</a:t>
+              <a:t>14/04/2026</a:t>
             </a:fld>
             <a:endParaRPr lang="en-BE"/>
           </a:p>
@@ -2932,7 +2932,7 @@
           <a:p>
             <a:fld id="{3A2AE38E-CBF9-4377-840F-40238855EB63}" type="datetimeFigureOut">
               <a:rPr lang="en-BE" smtClean="0"/>
-              <a:t>06/04/2026</a:t>
+              <a:t>14/04/2026</a:t>
             </a:fld>
             <a:endParaRPr lang="en-BE"/>
           </a:p>
@@ -3707,8 +3707,68 @@
         </p:blipFill>
         <p:spPr>
           <a:xfrm>
-            <a:off x="6736154" y="4904258"/>
+            <a:off x="6635177" y="5120835"/>
             <a:ext cx="4237087" cy="1425063"/>
+          </a:xfrm>
+          <a:prstGeom prst="rect">
+            <a:avLst/>
+          </a:prstGeom>
+        </p:spPr>
+      </p:pic>
+      <p:pic>
+        <p:nvPicPr>
+          <p:cNvPr id="4" name="Picture 3">
+            <a:extLst>
+              <a:ext uri="{FF2B5EF4-FFF2-40B4-BE49-F238E27FC236}">
+                <a16:creationId xmlns:a16="http://schemas.microsoft.com/office/drawing/2014/main" id="{9F27D953-1E61-A587-5F6C-0E50BB55FFC8}"/>
+              </a:ext>
+            </a:extLst>
+          </p:cNvPr>
+          <p:cNvPicPr>
+            <a:picLocks noChangeAspect="1"/>
+          </p:cNvPicPr>
+          <p:nvPr/>
+        </p:nvPicPr>
+        <p:blipFill>
+          <a:blip r:embed="rId13"/>
+          <a:stretch>
+            <a:fillRect/>
+          </a:stretch>
+        </p:blipFill>
+        <p:spPr>
+          <a:xfrm>
+            <a:off x="8930255" y="4335360"/>
+            <a:ext cx="2728096" cy="451458"/>
+          </a:xfrm>
+          <a:prstGeom prst="rect">
+            <a:avLst/>
+          </a:prstGeom>
+        </p:spPr>
+      </p:pic>
+      <p:pic>
+        <p:nvPicPr>
+          <p:cNvPr id="8" name="Picture 7">
+            <a:extLst>
+              <a:ext uri="{FF2B5EF4-FFF2-40B4-BE49-F238E27FC236}">
+                <a16:creationId xmlns:a16="http://schemas.microsoft.com/office/drawing/2014/main" id="{2625B0FC-C71F-FE77-46F7-A179003CAA2C}"/>
+              </a:ext>
+            </a:extLst>
+          </p:cNvPr>
+          <p:cNvPicPr>
+            <a:picLocks noChangeAspect="1"/>
+          </p:cNvPicPr>
+          <p:nvPr/>
+        </p:nvPicPr>
+        <p:blipFill>
+          <a:blip r:embed="rId14"/>
+          <a:stretch>
+            <a:fillRect/>
+          </a:stretch>
+        </p:blipFill>
+        <p:spPr>
+          <a:xfrm>
+            <a:off x="9626688" y="1896533"/>
+            <a:ext cx="2528820" cy="2438827"/>
           </a:xfrm>
           <a:prstGeom prst="rect">
             <a:avLst/>
@@ -3879,10 +3939,10 @@
       </p:pic>
       <p:pic>
         <p:nvPicPr>
-          <p:cNvPr id="16" name="Picture 15">
-            <a:extLst>
-              <a:ext uri="{FF2B5EF4-FFF2-40B4-BE49-F238E27FC236}">
-                <a16:creationId xmlns:a16="http://schemas.microsoft.com/office/drawing/2014/main" id="{98BE7767-055A-991F-F77A-8A5E57849178}"/>
+          <p:cNvPr id="20" name="Picture 19">
+            <a:extLst>
+              <a:ext uri="{FF2B5EF4-FFF2-40B4-BE49-F238E27FC236}">
+                <a16:creationId xmlns:a16="http://schemas.microsoft.com/office/drawing/2014/main" id="{0D817EB0-53EB-25A7-39B1-9C181F5128F5}"/>
               </a:ext>
             </a:extLst>
           </p:cNvPr>
@@ -3899,8 +3959,8 @@
         </p:blipFill>
         <p:spPr>
           <a:xfrm>
-            <a:off x="-37226" y="4061288"/>
-            <a:ext cx="3443123" cy="1417363"/>
+            <a:off x="3542770" y="378046"/>
+            <a:ext cx="2818762" cy="2244689"/>
           </a:xfrm>
           <a:prstGeom prst="rect">
             <a:avLst/>
@@ -3909,10 +3969,10 @@
       </p:pic>
       <p:pic>
         <p:nvPicPr>
-          <p:cNvPr id="20" name="Picture 19">
-            <a:extLst>
-              <a:ext uri="{FF2B5EF4-FFF2-40B4-BE49-F238E27FC236}">
-                <a16:creationId xmlns:a16="http://schemas.microsoft.com/office/drawing/2014/main" id="{0D817EB0-53EB-25A7-39B1-9C181F5128F5}"/>
+          <p:cNvPr id="24" name="Picture 23">
+            <a:extLst>
+              <a:ext uri="{FF2B5EF4-FFF2-40B4-BE49-F238E27FC236}">
+                <a16:creationId xmlns:a16="http://schemas.microsoft.com/office/drawing/2014/main" id="{3D2628D8-2201-EBE6-DAD0-B21B8C551AD4}"/>
               </a:ext>
             </a:extLst>
           </p:cNvPr>
@@ -3929,8 +3989,8 @@
         </p:blipFill>
         <p:spPr>
           <a:xfrm>
-            <a:off x="3542769" y="378046"/>
-            <a:ext cx="2977305" cy="2370943"/>
+            <a:off x="3265144" y="2748989"/>
+            <a:ext cx="3254930" cy="1355712"/>
           </a:xfrm>
           <a:prstGeom prst="rect">
             <a:avLst/>
@@ -3939,10 +3999,10 @@
       </p:pic>
       <p:pic>
         <p:nvPicPr>
-          <p:cNvPr id="24" name="Picture 23">
-            <a:extLst>
-              <a:ext uri="{FF2B5EF4-FFF2-40B4-BE49-F238E27FC236}">
-                <a16:creationId xmlns:a16="http://schemas.microsoft.com/office/drawing/2014/main" id="{3D2628D8-2201-EBE6-DAD0-B21B8C551AD4}"/>
+          <p:cNvPr id="27" name="Picture 26">
+            <a:extLst>
+              <a:ext uri="{FF2B5EF4-FFF2-40B4-BE49-F238E27FC236}">
+                <a16:creationId xmlns:a16="http://schemas.microsoft.com/office/drawing/2014/main" id="{18D1A0C3-91F8-54E9-9F2A-16F92AB8AC56}"/>
               </a:ext>
             </a:extLst>
           </p:cNvPr>
@@ -3959,8 +4019,8 @@
         </p:blipFill>
         <p:spPr>
           <a:xfrm>
-            <a:off x="3265144" y="2748989"/>
-            <a:ext cx="3254930" cy="1355712"/>
+            <a:off x="2755158" y="4230955"/>
+            <a:ext cx="3387267" cy="1503999"/>
           </a:xfrm>
           <a:prstGeom prst="rect">
             <a:avLst/>
@@ -3969,10 +4029,10 @@
       </p:pic>
       <p:pic>
         <p:nvPicPr>
-          <p:cNvPr id="27" name="Picture 26">
-            <a:extLst>
-              <a:ext uri="{FF2B5EF4-FFF2-40B4-BE49-F238E27FC236}">
-                <a16:creationId xmlns:a16="http://schemas.microsoft.com/office/drawing/2014/main" id="{18D1A0C3-91F8-54E9-9F2A-16F92AB8AC56}"/>
+          <p:cNvPr id="29" name="Picture 28">
+            <a:extLst>
+              <a:ext uri="{FF2B5EF4-FFF2-40B4-BE49-F238E27FC236}">
+                <a16:creationId xmlns:a16="http://schemas.microsoft.com/office/drawing/2014/main" id="{6E355FA3-265B-9474-FF7C-5A8074CEDDDE}"/>
               </a:ext>
             </a:extLst>
           </p:cNvPr>
@@ -3989,8 +4049,8 @@
         </p:blipFill>
         <p:spPr>
           <a:xfrm>
-            <a:off x="3405897" y="4169720"/>
-            <a:ext cx="3387267" cy="1503999"/>
+            <a:off x="6549369" y="378046"/>
+            <a:ext cx="3144034" cy="1501628"/>
           </a:xfrm>
           <a:prstGeom prst="rect">
             <a:avLst/>
@@ -3999,10 +4059,10 @@
       </p:pic>
       <p:pic>
         <p:nvPicPr>
-          <p:cNvPr id="29" name="Picture 28">
-            <a:extLst>
-              <a:ext uri="{FF2B5EF4-FFF2-40B4-BE49-F238E27FC236}">
-                <a16:creationId xmlns:a16="http://schemas.microsoft.com/office/drawing/2014/main" id="{6E355FA3-265B-9474-FF7C-5A8074CEDDDE}"/>
+          <p:cNvPr id="31" name="Picture 30">
+            <a:extLst>
+              <a:ext uri="{FF2B5EF4-FFF2-40B4-BE49-F238E27FC236}">
+                <a16:creationId xmlns:a16="http://schemas.microsoft.com/office/drawing/2014/main" id="{561ABD5B-3FE5-2921-19C7-C6E998CFD4A9}"/>
               </a:ext>
             </a:extLst>
           </p:cNvPr>
@@ -4019,8 +4079,8 @@
         </p:blipFill>
         <p:spPr>
           <a:xfrm>
-            <a:off x="6549369" y="378046"/>
-            <a:ext cx="3144034" cy="1501628"/>
+            <a:off x="6462671" y="1902292"/>
+            <a:ext cx="3265746" cy="1394294"/>
           </a:xfrm>
           <a:prstGeom prst="rect">
             <a:avLst/>
@@ -4029,10 +4089,10 @@
       </p:pic>
       <p:pic>
         <p:nvPicPr>
-          <p:cNvPr id="31" name="Picture 30">
-            <a:extLst>
-              <a:ext uri="{FF2B5EF4-FFF2-40B4-BE49-F238E27FC236}">
-                <a16:creationId xmlns:a16="http://schemas.microsoft.com/office/drawing/2014/main" id="{561ABD5B-3FE5-2921-19C7-C6E998CFD4A9}"/>
+          <p:cNvPr id="33" name="Picture 32">
+            <a:extLst>
+              <a:ext uri="{FF2B5EF4-FFF2-40B4-BE49-F238E27FC236}">
+                <a16:creationId xmlns:a16="http://schemas.microsoft.com/office/drawing/2014/main" id="{05C82457-F4BE-B22D-5BD8-BE832BF9AD5E}"/>
               </a:ext>
             </a:extLst>
           </p:cNvPr>
@@ -4049,8 +4109,8 @@
         </p:blipFill>
         <p:spPr>
           <a:xfrm>
-            <a:off x="6462671" y="1902292"/>
-            <a:ext cx="3265746" cy="1394294"/>
+            <a:off x="6603424" y="3255567"/>
+            <a:ext cx="2286198" cy="891617"/>
           </a:xfrm>
           <a:prstGeom prst="rect">
             <a:avLst/>
@@ -4059,10 +4119,10 @@
       </p:pic>
       <p:pic>
         <p:nvPicPr>
-          <p:cNvPr id="33" name="Picture 32">
-            <a:extLst>
-              <a:ext uri="{FF2B5EF4-FFF2-40B4-BE49-F238E27FC236}">
-                <a16:creationId xmlns:a16="http://schemas.microsoft.com/office/drawing/2014/main" id="{05C82457-F4BE-B22D-5BD8-BE832BF9AD5E}"/>
+          <p:cNvPr id="35" name="Picture 34">
+            <a:extLst>
+              <a:ext uri="{FF2B5EF4-FFF2-40B4-BE49-F238E27FC236}">
+                <a16:creationId xmlns:a16="http://schemas.microsoft.com/office/drawing/2014/main" id="{7DE3DEA5-FD71-0FF4-19FB-CAB38B834DC1}"/>
               </a:ext>
             </a:extLst>
           </p:cNvPr>
@@ -4073,36 +4133,6 @@
         </p:nvPicPr>
         <p:blipFill>
           <a:blip r:embed="rId11"/>
-          <a:stretch>
-            <a:fillRect/>
-          </a:stretch>
-        </p:blipFill>
-        <p:spPr>
-          <a:xfrm>
-            <a:off x="6603424" y="3255567"/>
-            <a:ext cx="2286198" cy="891617"/>
-          </a:xfrm>
-          <a:prstGeom prst="rect">
-            <a:avLst/>
-          </a:prstGeom>
-        </p:spPr>
-      </p:pic>
-      <p:pic>
-        <p:nvPicPr>
-          <p:cNvPr id="35" name="Picture 34">
-            <a:extLst>
-              <a:ext uri="{FF2B5EF4-FFF2-40B4-BE49-F238E27FC236}">
-                <a16:creationId xmlns:a16="http://schemas.microsoft.com/office/drawing/2014/main" id="{7DE3DEA5-FD71-0FF4-19FB-CAB38B834DC1}"/>
-              </a:ext>
-            </a:extLst>
-          </p:cNvPr>
-          <p:cNvPicPr>
-            <a:picLocks noChangeAspect="1"/>
-          </p:cNvPicPr>
-          <p:nvPr/>
-        </p:nvPicPr>
-        <p:blipFill>
-          <a:blip r:embed="rId12"/>
           <a:stretch>
             <a:fillRect/>
           </a:stretch>
